--- a/docs/제품제안서.pptx
+++ b/docs/제품제안서.pptx
@@ -3162,7 +3162,7 @@
         </p:nvSpPr>
         <p:spPr>
           <a:xfrm>
-            <a:off x="-1280160" y="3291840"/>
+            <a:off x="-906768" y="2598842"/>
             <a:ext cx="3657600" cy="3657600"/>
           </a:xfrm>
           <a:prstGeom prst="ellipse">
@@ -3189,7 +3189,7 @@
         </p:nvSpPr>
         <p:spPr>
           <a:xfrm>
-            <a:off x="8138160" y="-1097280"/>
+            <a:off x="7548880" y="-992124"/>
             <a:ext cx="2560320" cy="2560320"/>
           </a:xfrm>
           <a:prstGeom prst="ellipse">
@@ -3216,7 +3216,7 @@
         </p:nvSpPr>
         <p:spPr>
           <a:xfrm>
-            <a:off x="8641080" y="-594360"/>
+            <a:off x="8051800" y="-489204"/>
             <a:ext cx="1554480" cy="1554480"/>
           </a:xfrm>
           <a:prstGeom prst="ellipse">
@@ -3243,7 +3243,7 @@
         </p:nvSpPr>
         <p:spPr>
           <a:xfrm>
-            <a:off x="8641080" y="-411480"/>
+            <a:off x="8051800" y="-306324"/>
             <a:ext cx="1554480" cy="1371600"/>
           </a:xfrm>
           <a:prstGeom prst="rect">
@@ -3721,7 +3721,7 @@
         </p:nvSpPr>
         <p:spPr>
           <a:xfrm>
-            <a:off x="685800" y="4572000"/>
+            <a:off x="421641" y="4504267"/>
             <a:ext cx="5943600" cy="320040"/>
           </a:xfrm>
           <a:prstGeom prst="rect">
@@ -7268,7 +7268,7 @@
                 <a:ea typeface="Malgun Gothic" pitchFamily="34" charset="-122"/>
                 <a:cs typeface="Malgun Gothic" pitchFamily="34" charset="-120"/>
               </a:rPr>
-              <a:t>200개 언어 실시간 동시통역. Gemini Flash + Claude Haiku 하이브리드, 번역 지연 1초 미만.</a:t>
+              <a:t>203개 언어 실시간 동시통역. Gemini Flash + Claude Haiku 하이브리드, 번역 지연 1초 미만.</a:t>
             </a:r>
             <a:endParaRPr lang="en-US" sz="950" dirty="0"/>
           </a:p>
@@ -10890,7 +10890,7 @@
               <a:buNone/>
             </a:pPr>
             <a:r>
-              <a:rPr lang="ko-KR" altLang="en-US" sz="2700" b="1" dirty="0">
+              <a:rPr lang="en-US" altLang="ko-KR" sz="2700" b="1" dirty="0">
                 <a:solidFill>
                   <a:srgbClr val="F4B63F"/>
                 </a:solidFill>
@@ -10898,7 +10898,7 @@
                 <a:ea typeface="Malgun Gothic" pitchFamily="34" charset="-122"/>
                 <a:cs typeface="Malgun Gothic" pitchFamily="34" charset="-120"/>
               </a:rPr>
-              <a:t>２００</a:t>
+              <a:t>203</a:t>
             </a:r>
             <a:r>
               <a:rPr lang="en-US" sz="2700" b="1" dirty="0">

--- a/docs/제품제안서.pptx
+++ b/docs/제품제안서.pptx
@@ -2997,7 +2997,7 @@
                 <a:ea typeface="Malgun Gothic" pitchFamily="34" charset="-122"/>
                 <a:cs typeface="Malgun Gothic" pitchFamily="34" charset="-120"/>
               </a:rPr>
-              <a:t>16/16</a:t>
+              <a:t>19/19</a:t>
             </a:r>
             <a:endParaRPr lang="en-US" sz="2700" dirty="0"/>
           </a:p>
@@ -3667,7 +3667,7 @@
                 <a:ea typeface="Malgun Gothic" pitchFamily="34" charset="-122"/>
                 <a:cs typeface="Malgun Gothic" pitchFamily="34" charset="-120"/>
               </a:rPr>
-              <a:t>16개 Phase 100% 완료 — 실서비스 배포·운영 중</a:t>
+              <a:t>19개 Phase 100% 완료 — 실서비스 배포·운영 중</a:t>
             </a:r>
             <a:endParaRPr lang="en-US" sz="950" dirty="0"/>
           </a:p>
@@ -4517,7 +4517,7 @@
                 <a:ea typeface="Malgun Gothic" pitchFamily="34" charset="-122"/>
                 <a:cs typeface="Malgun Gothic" pitchFamily="34" charset="-120"/>
               </a:rPr>
-              <a:t>상세 스펙 ③ MyPiShop — P2P 직거래 &amp; LBS</a:t>
+              <a:t>상세 스펙 ③ MyPiShop — P2P·O2O 직거래 &amp; LBS</a:t>
             </a:r>
             <a:endParaRPr lang="en-US" sz="1300" dirty="0"/>
           </a:p>
@@ -5060,7 +5060,7 @@
                 <a:ea typeface="Malgun Gothic" pitchFamily="34" charset="-122"/>
                 <a:cs typeface="Malgun Gothic" pitchFamily="34" charset="-120"/>
               </a:rPr>
-              <a:t>P2P 직거래</a:t>
+              <a:t>P2P·O2O 직거래</a:t>
             </a:r>
             <a:endParaRPr lang="en-US" sz="1200" dirty="0"/>
           </a:p>
@@ -5799,7 +5799,7 @@
                 <a:ea typeface="Malgun Gothic" pitchFamily="34" charset="-122"/>
                 <a:cs typeface="Malgun Gothic" pitchFamily="34" charset="-120"/>
               </a:rPr>
-              <a:t>16 Phase 완성</a:t>
+              <a:t>19 Phase 완성</a:t>
             </a:r>
             <a:endParaRPr lang="en-US" sz="950" dirty="0"/>
           </a:p>
@@ -6226,7 +6226,7 @@
                 <a:ea typeface="Malgun Gothic" pitchFamily="34" charset="-122"/>
                 <a:cs typeface="Malgun Gothic" pitchFamily="34" charset="-120"/>
               </a:rPr>
-              <a:t>16 / 16</a:t>
+              <a:t>19 / 19</a:t>
             </a:r>
             <a:endParaRPr lang="en-US" sz="2700" dirty="0"/>
           </a:p>
@@ -7113,7 +7113,7 @@
                 <a:ea typeface="Malgun Gothic" pitchFamily="34" charset="-122"/>
                 <a:cs typeface="Malgun Gothic" pitchFamily="34" charset="-120"/>
               </a:rPr>
-              <a:t>테마 기반 커뮤니티 카페. 구독 3티어, Pi Bean 선물, 스티커, AI 비서, 이벤트방 — 인라인 구매 트리거 8종.</a:t>
+              <a:t>테마 기반 커뮤니티 카페. 상품군별 구독, Bean 선물, 스티커, AI 비서, 이벤트방 — 인라인 구매 트리거 8종.</a:t>
             </a:r>
             <a:endParaRPr lang="en-US" sz="950" dirty="0"/>
           </a:p>
@@ -7423,7 +7423,7 @@
                 <a:ea typeface="Malgun Gothic" pitchFamily="34" charset="-122"/>
                 <a:cs typeface="Malgun Gothic" pitchFamily="34" charset="-120"/>
               </a:rPr>
-              <a:t>Pi 코인 전용 P2P 직거래. 에스크로 자동 정산, 재고·주문 상태 머신, 판매자 보증금.</a:t>
+              <a:t>Pi 코인 P2P·O2O 직거래. 에스크로 자동 정산, 재고·주문 상태 머신, 판매자 보증금.</a:t>
             </a:r>
             <a:endParaRPr lang="en-US" sz="950" dirty="0"/>
           </a:p>
@@ -8381,7 +8381,7 @@
                 <a:ea typeface="Malgun Gothic" pitchFamily="34" charset="-122"/>
                 <a:cs typeface="Malgun Gothic" pitchFamily="34" charset="-120"/>
               </a:rPr>
-              <a:t>0.1π 개설 비용이 진지한 방장을 자동 선별 — 방치되는 방이 없습니다.</a:t>
+              <a:t>소액 Bean 개설 비용이 진지한 방장을 자동 선별 — 방치되는 방이 없습니다.</a:t>
             </a:r>
             <a:endParaRPr lang="en-US" sz="1200" dirty="0"/>
           </a:p>
@@ -8444,7 +8444,7 @@
                   <a:srgbClr val="000000"/>
                 </a:solidFill>
               </a:rPr>
-              <a:t>🫘</a:t>
+              <a:t>☕</a:t>
             </a:r>
             <a:endParaRPr lang="en-US" sz="1600" dirty="0"/>
           </a:p>
@@ -8500,7 +8500,7 @@
                 <a:ea typeface="Malgun Gothic" pitchFamily="34" charset="-122"/>
                 <a:cs typeface="Malgun Gothic" pitchFamily="34" charset="-120"/>
               </a:rPr>
-              <a:t>Pi Bean 선물로 좋은 콘텐츠에 즉시 보상 — 크리에이터 수수료 0%.</a:t>
+              <a:t>Bean(커피빈) 선물로 좋은 콘텐츠에 즉시 보상 — 크리에이터 수수료 0%.</a:t>
             </a:r>
             <a:endParaRPr lang="en-US" sz="1200" dirty="0"/>
           </a:p>
@@ -8791,7 +8791,7 @@
                 <a:ea typeface="Malgun Gothic" pitchFamily="34" charset="-122"/>
                 <a:cs typeface="Malgun Gothic" pitchFamily="34" charset="-120"/>
               </a:rPr>
-              <a:t>구독 3티어 — Pi로 여는 단계별 경험</a:t>
+              <a:t>상품군별 구독 — 충전한 Bean으로 (연 = 월 × 10, 2개월 무료)</a:t>
             </a:r>
             <a:endParaRPr lang="en-US" sz="1250" dirty="0"/>
           </a:p>
@@ -8896,7 +8896,7 @@
                 <a:ea typeface="Malgun Gothic" pitchFamily="34" charset="-122"/>
                 <a:cs typeface="Malgun Gothic" pitchFamily="34" charset="-120"/>
               </a:rPr>
-              <a:t>Free — Pi Explorer   </a:t>
+              <a:t>☕ PiCafe   </a:t>
             </a:r>
             <a:r>
               <a:rPr lang="en-US" sz="1200" b="1" dirty="0">
@@ -8907,7 +8907,7 @@
                 <a:ea typeface="Malgun Gothic" pitchFamily="34" charset="-122"/>
                 <a:cs typeface="Malgun Gothic" pitchFamily="34" charset="-120"/>
               </a:rPr>
-              <a:t>0 π</a:t>
+              <a:t>3,000 Bean/월</a:t>
             </a:r>
             <a:endParaRPr lang="en-US" sz="1200" dirty="0"/>
           </a:p>
@@ -8946,7 +8946,7 @@
                 <a:ea typeface="Malgun Gothic" pitchFamily="34" charset="-122"/>
                 <a:cs typeface="Malgun Gothic" pitchFamily="34" charset="-120"/>
               </a:rPr>
-              <a:t>1:1 카페 무제한 · 기본 테마 6개 · 그룹방 5개 참여</a:t>
+              <a:t>프리미엄 테마 전체 · 그룹방 무제한 · AI 비서 · Bean 선물</a:t>
             </a:r>
             <a:endParaRPr lang="en-US" sz="950" dirty="0"/>
           </a:p>
@@ -9051,7 +9051,7 @@
                 <a:ea typeface="Malgun Gothic" pitchFamily="34" charset="-122"/>
                 <a:cs typeface="Malgun Gothic" pitchFamily="34" charset="-120"/>
               </a:rPr>
-              <a:t>Premium — Pi Creator   </a:t>
+              <a:t>🏪 PiStore   </a:t>
             </a:r>
             <a:r>
               <a:rPr lang="en-US" sz="1200" b="1" dirty="0">
@@ -9062,7 +9062,7 @@
                 <a:ea typeface="Malgun Gothic" pitchFamily="34" charset="-122"/>
                 <a:cs typeface="Malgun Gothic" pitchFamily="34" charset="-120"/>
               </a:rPr>
-              <a:t>1 π/월</a:t>
+              <a:t>3,000~ Bean/월</a:t>
             </a:r>
             <a:endParaRPr lang="en-US" sz="1200" dirty="0"/>
           </a:p>
@@ -9101,7 +9101,7 @@
                 <a:ea typeface="Malgun Gothic" pitchFamily="34" charset="-122"/>
                 <a:cs typeface="Malgun Gothic" pitchFamily="34" charset="-120"/>
               </a:rPr>
-              <a:t>전체 테마 20+ · 그룹방 무제한 · 월 3개 무료 개설 · AI 10회</a:t>
+              <a:t>상품 S·M·L 30/50/무제한 · 매장 통계 · 우선 노출</a:t>
             </a:r>
             <a:endParaRPr lang="en-US" sz="950" dirty="0"/>
           </a:p>
@@ -9206,7 +9206,7 @@
                 <a:ea typeface="Malgun Gothic" pitchFamily="34" charset="-122"/>
                 <a:cs typeface="Malgun Gothic" pitchFamily="34" charset="-120"/>
               </a:rPr>
-              <a:t>Business — Pi Host   </a:t>
+              <a:t>💬 자동번역   </a:t>
             </a:r>
             <a:r>
               <a:rPr lang="en-US" sz="1200" b="1" dirty="0">
@@ -9217,7 +9217,7 @@
                 <a:ea typeface="Malgun Gothic" pitchFamily="34" charset="-122"/>
                 <a:cs typeface="Malgun Gothic" pitchFamily="34" charset="-120"/>
               </a:rPr>
-              <a:t>5 π/월</a:t>
+              <a:t>1,000 Bean/월</a:t>
             </a:r>
             <a:endParaRPr lang="en-US" sz="1200" dirty="0"/>
           </a:p>
@@ -9256,7 +9256,7 @@
                 <a:ea typeface="Malgun Gothic" pitchFamily="34" charset="-122"/>
                 <a:cs typeface="Malgun Gothic" pitchFamily="34" charset="-120"/>
               </a:rPr>
-              <a:t>이벤트방 · 분석 대시보드 · Webhook · 커스텀 스티커 · AI 무제한</a:t>
+              <a:t>203개 언어 실시간 동시통역 · 비구독자는 건당 Bean</a:t>
             </a:r>
             <a:endParaRPr lang="en-US" sz="950" dirty="0"/>
           </a:p>
@@ -9917,7 +9917,7 @@
                 <a:ea typeface="Malgun Gothic" pitchFamily="34" charset="-122"/>
                 <a:cs typeface="Malgun Gothic" pitchFamily="34" charset="-120"/>
               </a:rPr>
-              <a:t>Gemini 2.0 Flash 주력</a:t>
+              <a:t>Gemini 2.5 Flash 주력</a:t>
             </a:r>
             <a:endParaRPr lang="en-US" sz="850" dirty="0"/>
           </a:p>
@@ -11205,7 +11205,7 @@
                 <a:ea typeface="Malgun Gothic" pitchFamily="34" charset="-122"/>
                 <a:cs typeface="Malgun Gothic" pitchFamily="34" charset="-120"/>
               </a:rPr>
-              <a:t>MyPiShop — Pi 코인 P2P 직거래 &amp; 위치기반 커머스</a:t>
+              <a:t>MyPiShop — Pi 코인 P2P·O2O 직거래 &amp; 위치기반 커머스</a:t>
             </a:r>
             <a:endParaRPr lang="en-US" sz="2500" dirty="0"/>
           </a:p>
